--- a/PCS-Customer-Portal-Stage2-Stage3-Overview.pptx
+++ b/PCS-Customer-Portal-Stage2-Stage3-Overview.pptx
@@ -1548,7 +1548,7 @@
                             <a:srgbClr val="1E293B"/>
                           </a:solidFill>
                         </a:rPr>
-                        <a:t>Catalog, Quotes &amp; Offers</a:t>
+                        <a:t>Catalog, Sales Estimates &amp; Offers</a:t>
                       </a:r>
                       <a:endParaRPr lang="en-US" sz="1300" dirty="0"/>
                     </a:p>
@@ -1606,7 +1606,7 @@
                             <a:srgbClr val="334155"/>
                           </a:solidFill>
                         </a:rPr>
-                        <a:t>Browse catalog, build &amp; submit quotes, promotional offers — US-90–US-99</a:t>
+                        <a:t>Browse catalog, build &amp; submit sales estimates, promotional offers — US-90–US-99</a:t>
                       </a:r>
                       <a:endParaRPr lang="en-US" sz="1300" dirty="0"/>
                     </a:p>
